--- a/results/figures/logger.array/norwood.logger.array.pptx
+++ b/results/figures/logger.array/norwood.logger.array.pptx
@@ -6,6 +6,7 @@
   </p:sldMasterIdLst>
   <p:sldIdLst>
     <p:sldId id="256" r:id="rId2"/>
+    <p:sldId id="257" r:id="rId3"/>
   </p:sldIdLst>
   <p:sldSz cx="12192000" cy="6858000"/>
   <p:notesSz cx="6858000" cy="9144000"/>
@@ -254,7 +255,7 @@
           <a:p>
             <a:fld id="{157A4368-9A9D-4C78-BCCC-9984E7E3E5A4}" type="datetimeFigureOut">
               <a:rPr lang="en-US" smtClean="0"/>
-              <a:t>11/16/2022</a:t>
+              <a:t>12/13/2022</a:t>
             </a:fld>
             <a:endParaRPr lang="en-US"/>
           </a:p>
@@ -424,7 +425,7 @@
           <a:p>
             <a:fld id="{157A4368-9A9D-4C78-BCCC-9984E7E3E5A4}" type="datetimeFigureOut">
               <a:rPr lang="en-US" smtClean="0"/>
-              <a:t>11/16/2022</a:t>
+              <a:t>12/13/2022</a:t>
             </a:fld>
             <a:endParaRPr lang="en-US"/>
           </a:p>
@@ -604,7 +605,7 @@
           <a:p>
             <a:fld id="{157A4368-9A9D-4C78-BCCC-9984E7E3E5A4}" type="datetimeFigureOut">
               <a:rPr lang="en-US" smtClean="0"/>
-              <a:t>11/16/2022</a:t>
+              <a:t>12/13/2022</a:t>
             </a:fld>
             <a:endParaRPr lang="en-US"/>
           </a:p>
@@ -774,7 +775,7 @@
           <a:p>
             <a:fld id="{157A4368-9A9D-4C78-BCCC-9984E7E3E5A4}" type="datetimeFigureOut">
               <a:rPr lang="en-US" smtClean="0"/>
-              <a:t>11/16/2022</a:t>
+              <a:t>12/13/2022</a:t>
             </a:fld>
             <a:endParaRPr lang="en-US"/>
           </a:p>
@@ -1020,7 +1021,7 @@
           <a:p>
             <a:fld id="{157A4368-9A9D-4C78-BCCC-9984E7E3E5A4}" type="datetimeFigureOut">
               <a:rPr lang="en-US" smtClean="0"/>
-              <a:t>11/16/2022</a:t>
+              <a:t>12/13/2022</a:t>
             </a:fld>
             <a:endParaRPr lang="en-US"/>
           </a:p>
@@ -1252,7 +1253,7 @@
           <a:p>
             <a:fld id="{157A4368-9A9D-4C78-BCCC-9984E7E3E5A4}" type="datetimeFigureOut">
               <a:rPr lang="en-US" smtClean="0"/>
-              <a:t>11/16/2022</a:t>
+              <a:t>12/13/2022</a:t>
             </a:fld>
             <a:endParaRPr lang="en-US"/>
           </a:p>
@@ -1619,7 +1620,7 @@
           <a:p>
             <a:fld id="{157A4368-9A9D-4C78-BCCC-9984E7E3E5A4}" type="datetimeFigureOut">
               <a:rPr lang="en-US" smtClean="0"/>
-              <a:t>11/16/2022</a:t>
+              <a:t>12/13/2022</a:t>
             </a:fld>
             <a:endParaRPr lang="en-US"/>
           </a:p>
@@ -1737,7 +1738,7 @@
           <a:p>
             <a:fld id="{157A4368-9A9D-4C78-BCCC-9984E7E3E5A4}" type="datetimeFigureOut">
               <a:rPr lang="en-US" smtClean="0"/>
-              <a:t>11/16/2022</a:t>
+              <a:t>12/13/2022</a:t>
             </a:fld>
             <a:endParaRPr lang="en-US"/>
           </a:p>
@@ -1832,7 +1833,7 @@
           <a:p>
             <a:fld id="{157A4368-9A9D-4C78-BCCC-9984E7E3E5A4}" type="datetimeFigureOut">
               <a:rPr lang="en-US" smtClean="0"/>
-              <a:t>11/16/2022</a:t>
+              <a:t>12/13/2022</a:t>
             </a:fld>
             <a:endParaRPr lang="en-US"/>
           </a:p>
@@ -2109,7 +2110,7 @@
           <a:p>
             <a:fld id="{157A4368-9A9D-4C78-BCCC-9984E7E3E5A4}" type="datetimeFigureOut">
               <a:rPr lang="en-US" smtClean="0"/>
-              <a:t>11/16/2022</a:t>
+              <a:t>12/13/2022</a:t>
             </a:fld>
             <a:endParaRPr lang="en-US"/>
           </a:p>
@@ -2362,7 +2363,7 @@
           <a:p>
             <a:fld id="{157A4368-9A9D-4C78-BCCC-9984E7E3E5A4}" type="datetimeFigureOut">
               <a:rPr lang="en-US" smtClean="0"/>
-              <a:t>11/16/2022</a:t>
+              <a:t>12/13/2022</a:t>
             </a:fld>
             <a:endParaRPr lang="en-US"/>
           </a:p>
@@ -2575,7 +2576,7 @@
           <a:p>
             <a:fld id="{157A4368-9A9D-4C78-BCCC-9984E7E3E5A4}" type="datetimeFigureOut">
               <a:rPr lang="en-US" smtClean="0"/>
-              <a:t>11/16/2022</a:t>
+              <a:t>12/13/2022</a:t>
             </a:fld>
             <a:endParaRPr lang="en-US"/>
           </a:p>
@@ -3181,6 +3182,223 @@
 </p:sld>
 </file>
 
+<file path=ppt/slides/slide2.xml><?xml version="1.0" encoding="utf-8"?>
+<p:sld xmlns:a="http://schemas.openxmlformats.org/drawingml/2006/main" xmlns:r="http://schemas.openxmlformats.org/officeDocument/2006/relationships" xmlns:p="http://schemas.openxmlformats.org/presentationml/2006/main">
+  <p:cSld>
+    <p:spTree>
+      <p:nvGrpSpPr>
+        <p:cNvPr id="1" name=""/>
+        <p:cNvGrpSpPr/>
+        <p:nvPr/>
+      </p:nvGrpSpPr>
+      <p:grpSpPr>
+        <a:xfrm>
+          <a:off x="0" y="0"/>
+          <a:ext cx="0" cy="0"/>
+          <a:chOff x="0" y="0"/>
+          <a:chExt cx="0" cy="0"/>
+        </a:xfrm>
+      </p:grpSpPr>
+      <p:pic>
+        <p:nvPicPr>
+          <p:cNvPr id="11" name="Content Placeholder 10"/>
+          <p:cNvPicPr>
+            <a:picLocks noGrp="1" noChangeAspect="1"/>
+          </p:cNvPicPr>
+          <p:nvPr>
+            <p:ph idx="1"/>
+          </p:nvPr>
+        </p:nvPicPr>
+        <p:blipFill>
+          <a:blip r:embed="rId2">
+            <a:extLst>
+              <a:ext uri="{28A0092B-C50C-407E-A947-70E740481C1C}">
+                <a14:useLocalDpi xmlns:a14="http://schemas.microsoft.com/office/drawing/2010/main" val="0"/>
+              </a:ext>
+            </a:extLst>
+          </a:blip>
+          <a:stretch>
+            <a:fillRect/>
+          </a:stretch>
+        </p:blipFill>
+        <p:spPr>
+          <a:xfrm>
+            <a:off x="1536503" y="878890"/>
+            <a:ext cx="10236954" cy="5395728"/>
+          </a:xfrm>
+        </p:spPr>
+      </p:pic>
+      <p:sp>
+        <p:nvSpPr>
+          <p:cNvPr id="6" name="Left Brace 5"/>
+          <p:cNvSpPr/>
+          <p:nvPr/>
+        </p:nvSpPr>
+        <p:spPr>
+          <a:xfrm>
+            <a:off x="1318674" y="1707463"/>
+            <a:ext cx="332667" cy="2334827"/>
+          </a:xfrm>
+          <a:prstGeom prst="leftBrace">
+            <a:avLst/>
+          </a:prstGeom>
+          <a:ln w="12700">
+            <a:solidFill>
+              <a:srgbClr val="FF0000"/>
+            </a:solidFill>
+          </a:ln>
+        </p:spPr>
+        <p:style>
+          <a:lnRef idx="1">
+            <a:schemeClr val="accent1"/>
+          </a:lnRef>
+          <a:fillRef idx="0">
+            <a:schemeClr val="accent1"/>
+          </a:fillRef>
+          <a:effectRef idx="0">
+            <a:schemeClr val="accent1"/>
+          </a:effectRef>
+          <a:fontRef idx="minor">
+            <a:schemeClr val="tx1"/>
+          </a:fontRef>
+        </p:style>
+        <p:txBody>
+          <a:bodyPr rtlCol="0" anchor="ctr"/>
+          <a:lstStyle/>
+          <a:p>
+            <a:pPr algn="ctr"/>
+            <a:endParaRPr lang="en-US"/>
+          </a:p>
+        </p:txBody>
+      </p:sp>
+      <p:sp>
+        <p:nvSpPr>
+          <p:cNvPr id="7" name="Left Brace 6"/>
+          <p:cNvSpPr/>
+          <p:nvPr/>
+        </p:nvSpPr>
+        <p:spPr>
+          <a:xfrm>
+            <a:off x="1369967" y="4352047"/>
+            <a:ext cx="230079" cy="1376035"/>
+          </a:xfrm>
+          <a:prstGeom prst="leftBrace">
+            <a:avLst/>
+          </a:prstGeom>
+          <a:ln w="12700">
+            <a:solidFill>
+              <a:srgbClr val="FF0000"/>
+            </a:solidFill>
+          </a:ln>
+        </p:spPr>
+        <p:style>
+          <a:lnRef idx="1">
+            <a:schemeClr val="accent1"/>
+          </a:lnRef>
+          <a:fillRef idx="0">
+            <a:schemeClr val="accent1"/>
+          </a:fillRef>
+          <a:effectRef idx="0">
+            <a:schemeClr val="accent1"/>
+          </a:effectRef>
+          <a:fontRef idx="minor">
+            <a:schemeClr val="tx1"/>
+          </a:fontRef>
+        </p:style>
+        <p:txBody>
+          <a:bodyPr rtlCol="0" anchor="ctr"/>
+          <a:lstStyle/>
+          <a:p>
+            <a:pPr algn="ctr"/>
+            <a:endParaRPr lang="en-US"/>
+          </a:p>
+        </p:txBody>
+      </p:sp>
+      <p:sp>
+        <p:nvSpPr>
+          <p:cNvPr id="8" name="TextBox 7"/>
+          <p:cNvSpPr txBox="1"/>
+          <p:nvPr/>
+        </p:nvSpPr>
+        <p:spPr>
+          <a:xfrm>
+            <a:off x="189609" y="2718620"/>
+            <a:ext cx="1311378" cy="276999"/>
+          </a:xfrm>
+          <a:prstGeom prst="rect">
+            <a:avLst/>
+          </a:prstGeom>
+          <a:noFill/>
+        </p:spPr>
+        <p:txBody>
+          <a:bodyPr wrap="square" rtlCol="0">
+            <a:spAutoFit/>
+          </a:bodyPr>
+          <a:lstStyle/>
+          <a:p>
+            <a:r>
+              <a:rPr lang="en-US" sz="1200" dirty="0" smtClean="0">
+                <a:latin typeface="Times New Roman" panose="02020603050405020304" pitchFamily="18" charset="0"/>
+                <a:cs typeface="Times New Roman" panose="02020603050405020304" pitchFamily="18" charset="0"/>
+              </a:rPr>
+              <a:t>Temperature ℃</a:t>
+            </a:r>
+            <a:endParaRPr lang="en-US" sz="1200" dirty="0">
+              <a:latin typeface="Times New Roman" panose="02020603050405020304" pitchFamily="18" charset="0"/>
+              <a:cs typeface="Times New Roman" panose="02020603050405020304" pitchFamily="18" charset="0"/>
+            </a:endParaRPr>
+          </a:p>
+        </p:txBody>
+      </p:sp>
+      <p:sp>
+        <p:nvSpPr>
+          <p:cNvPr id="9" name="TextBox 8"/>
+          <p:cNvSpPr txBox="1"/>
+          <p:nvPr/>
+        </p:nvSpPr>
+        <p:spPr>
+          <a:xfrm>
+            <a:off x="376758" y="4809233"/>
+            <a:ext cx="1141989" cy="461665"/>
+          </a:xfrm>
+          <a:prstGeom prst="rect">
+            <a:avLst/>
+          </a:prstGeom>
+          <a:noFill/>
+        </p:spPr>
+        <p:txBody>
+          <a:bodyPr wrap="square" rtlCol="0">
+            <a:spAutoFit/>
+          </a:bodyPr>
+          <a:lstStyle/>
+          <a:p>
+            <a:r>
+              <a:rPr lang="en-US" sz="1200" dirty="0" smtClean="0">
+                <a:latin typeface="Times New Roman" panose="02020603050405020304" pitchFamily="18" charset="0"/>
+                <a:cs typeface="Times New Roman" panose="02020603050405020304" pitchFamily="18" charset="0"/>
+              </a:rPr>
+              <a:t>Dissolved oxygen mg/L</a:t>
+            </a:r>
+            <a:endParaRPr lang="en-US" sz="1200" dirty="0">
+              <a:latin typeface="Times New Roman" panose="02020603050405020304" pitchFamily="18" charset="0"/>
+              <a:cs typeface="Times New Roman" panose="02020603050405020304" pitchFamily="18" charset="0"/>
+            </a:endParaRPr>
+          </a:p>
+        </p:txBody>
+      </p:sp>
+    </p:spTree>
+    <p:extLst>
+      <p:ext uri="{BB962C8B-B14F-4D97-AF65-F5344CB8AC3E}">
+        <p14:creationId xmlns:p14="http://schemas.microsoft.com/office/powerpoint/2010/main" val="4242222304"/>
+      </p:ext>
+    </p:extLst>
+  </p:cSld>
+  <p:clrMapOvr>
+    <a:masterClrMapping/>
+  </p:clrMapOvr>
+</p:sld>
+</file>
+
 <file path=ppt/theme/theme1.xml><?xml version="1.0" encoding="utf-8"?>
 <a:theme xmlns:a="http://schemas.openxmlformats.org/drawingml/2006/main" name="Office Theme">
   <a:themeElements>
